--- a/Presentation/Smart_LPG_Project.pptx
+++ b/Presentation/Smart_LPG_Project.pptx
@@ -5,12 +5,15 @@
     <p:sldMasterId id="2147483648" r:id="rId1"/>
   </p:sldMasterIdLst>
   <p:sldIdLst>
-    <p:sldId id="256" r:id="rId7"/>
-    <p:sldId id="257" r:id="rId8"/>
-    <p:sldId id="258" r:id="rId9"/>
-    <p:sldId id="259" r:id="rId10"/>
-    <p:sldId id="260" r:id="rId11"/>
-    <p:sldId id="261" r:id="rId12"/>
+    <p:sldId id="256" r:id="rId2"/>
+    <p:sldId id="257" r:id="rId3"/>
+    <p:sldId id="258" r:id="rId4"/>
+    <p:sldId id="264" r:id="rId5"/>
+    <p:sldId id="259" r:id="rId6"/>
+    <p:sldId id="262" r:id="rId7"/>
+    <p:sldId id="263" r:id="rId8"/>
+    <p:sldId id="260" r:id="rId9"/>
+    <p:sldId id="261" r:id="rId10"/>
   </p:sldIdLst>
   <p:sldSz cx="9144000" cy="6858000" type="screen4x3"/>
   <p:notesSz cx="6858000" cy="9144000"/>
@@ -109,6 +112,22 @@
       </a:defRPr>
     </a:lvl9pPr>
   </p:defaultTextStyle>
+  <p:extLst>
+    <p:ext uri="{EFAFB233-063F-42B5-8137-9DF3F51BA10A}">
+      <p15:sldGuideLst xmlns:p15="http://schemas.microsoft.com/office/powerpoint/2012/main">
+        <p15:guide id="1" orient="horz" pos="2160">
+          <p15:clr>
+            <a:srgbClr val="A4A3A4"/>
+          </p15:clr>
+        </p15:guide>
+        <p15:guide id="2" pos="2880">
+          <p15:clr>
+            <a:srgbClr val="A4A3A4"/>
+          </p15:clr>
+        </p15:guide>
+      </p15:sldGuideLst>
+    </p:ext>
+  </p:extLst>
 </p:presentation>
 </file>
 
@@ -150,10 +169,9 @@
           <a:lstStyle/>
           <a:p>
             <a:r>
-              <a:rPr lang="en-US" smtClean="0"/>
+              <a:rPr lang="en-US"/>
               <a:t>Click to edit Master title style</a:t>
             </a:r>
-            <a:endParaRPr lang="en-US"/>
           </a:p>
         </p:txBody>
       </p:sp>
@@ -269,10 +287,9 @@
           </a:lstStyle>
           <a:p>
             <a:r>
-              <a:rPr lang="en-US" smtClean="0"/>
+              <a:rPr lang="en-US"/>
               <a:t>Click to edit Master subtitle style</a:t>
             </a:r>
-            <a:endParaRPr lang="en-US"/>
           </a:p>
         </p:txBody>
       </p:sp>
@@ -293,7 +310,7 @@
           <a:p>
             <a:fld id="{5BCAD085-E8A6-8845-BD4E-CB4CCA059FC4}" type="datetimeFigureOut">
               <a:rPr lang="en-US" smtClean="0"/>
-              <a:t>1/27/13</a:t>
+              <a:t>7/11/2026</a:t>
             </a:fld>
             <a:endParaRPr lang="en-US"/>
           </a:p>
@@ -387,10 +404,9 @@
           <a:lstStyle/>
           <a:p>
             <a:r>
-              <a:rPr lang="en-US" smtClean="0"/>
+              <a:rPr lang="en-US"/>
               <a:t>Click to edit Master title style</a:t>
             </a:r>
-            <a:endParaRPr lang="en-US"/>
           </a:p>
         </p:txBody>
       </p:sp>
@@ -411,38 +427,37 @@
           <a:p>
             <a:pPr lvl="0"/>
             <a:r>
-              <a:rPr lang="en-US" smtClean="0"/>
+              <a:rPr lang="en-US"/>
               <a:t>Click to edit Master text styles</a:t>
             </a:r>
           </a:p>
           <a:p>
             <a:pPr lvl="1"/>
             <a:r>
-              <a:rPr lang="en-US" smtClean="0"/>
+              <a:rPr lang="en-US"/>
               <a:t>Second level</a:t>
             </a:r>
           </a:p>
           <a:p>
             <a:pPr lvl="2"/>
             <a:r>
-              <a:rPr lang="en-US" smtClean="0"/>
+              <a:rPr lang="en-US"/>
               <a:t>Third level</a:t>
             </a:r>
           </a:p>
           <a:p>
             <a:pPr lvl="3"/>
             <a:r>
-              <a:rPr lang="en-US" smtClean="0"/>
+              <a:rPr lang="en-US"/>
               <a:t>Fourth level</a:t>
             </a:r>
           </a:p>
           <a:p>
             <a:pPr lvl="4"/>
             <a:r>
-              <a:rPr lang="en-US" smtClean="0"/>
+              <a:rPr lang="en-US"/>
               <a:t>Fifth level</a:t>
             </a:r>
-            <a:endParaRPr lang="en-US"/>
           </a:p>
         </p:txBody>
       </p:sp>
@@ -463,7 +478,7 @@
           <a:p>
             <a:fld id="{5BCAD085-E8A6-8845-BD4E-CB4CCA059FC4}" type="datetimeFigureOut">
               <a:rPr lang="en-US" smtClean="0"/>
-              <a:t>1/27/13</a:t>
+              <a:t>7/11/2026</a:t>
             </a:fld>
             <a:endParaRPr lang="en-US"/>
           </a:p>
@@ -562,10 +577,9 @@
           <a:lstStyle/>
           <a:p>
             <a:r>
-              <a:rPr lang="en-US" smtClean="0"/>
+              <a:rPr lang="en-US"/>
               <a:t>Click to edit Master title style</a:t>
             </a:r>
-            <a:endParaRPr lang="en-US"/>
           </a:p>
         </p:txBody>
       </p:sp>
@@ -591,38 +605,37 @@
           <a:p>
             <a:pPr lvl="0"/>
             <a:r>
-              <a:rPr lang="en-US" smtClean="0"/>
+              <a:rPr lang="en-US"/>
               <a:t>Click to edit Master text styles</a:t>
             </a:r>
           </a:p>
           <a:p>
             <a:pPr lvl="1"/>
             <a:r>
-              <a:rPr lang="en-US" smtClean="0"/>
+              <a:rPr lang="en-US"/>
               <a:t>Second level</a:t>
             </a:r>
           </a:p>
           <a:p>
             <a:pPr lvl="2"/>
             <a:r>
-              <a:rPr lang="en-US" smtClean="0"/>
+              <a:rPr lang="en-US"/>
               <a:t>Third level</a:t>
             </a:r>
           </a:p>
           <a:p>
             <a:pPr lvl="3"/>
             <a:r>
-              <a:rPr lang="en-US" smtClean="0"/>
+              <a:rPr lang="en-US"/>
               <a:t>Fourth level</a:t>
             </a:r>
           </a:p>
           <a:p>
             <a:pPr lvl="4"/>
             <a:r>
-              <a:rPr lang="en-US" smtClean="0"/>
+              <a:rPr lang="en-US"/>
               <a:t>Fifth level</a:t>
             </a:r>
-            <a:endParaRPr lang="en-US"/>
           </a:p>
         </p:txBody>
       </p:sp>
@@ -643,7 +656,7 @@
           <a:p>
             <a:fld id="{5BCAD085-E8A6-8845-BD4E-CB4CCA059FC4}" type="datetimeFigureOut">
               <a:rPr lang="en-US" smtClean="0"/>
-              <a:t>1/27/13</a:t>
+              <a:t>7/11/2026</a:t>
             </a:fld>
             <a:endParaRPr lang="en-US"/>
           </a:p>
@@ -737,10 +750,9 @@
           <a:lstStyle/>
           <a:p>
             <a:r>
-              <a:rPr lang="en-US" smtClean="0"/>
+              <a:rPr lang="en-US"/>
               <a:t>Click to edit Master title style</a:t>
             </a:r>
-            <a:endParaRPr lang="en-US"/>
           </a:p>
         </p:txBody>
       </p:sp>
@@ -761,38 +773,37 @@
           <a:p>
             <a:pPr lvl="0"/>
             <a:r>
-              <a:rPr lang="en-US" smtClean="0"/>
+              <a:rPr lang="en-US"/>
               <a:t>Click to edit Master text styles</a:t>
             </a:r>
           </a:p>
           <a:p>
             <a:pPr lvl="1"/>
             <a:r>
-              <a:rPr lang="en-US" smtClean="0"/>
+              <a:rPr lang="en-US"/>
               <a:t>Second level</a:t>
             </a:r>
           </a:p>
           <a:p>
             <a:pPr lvl="2"/>
             <a:r>
-              <a:rPr lang="en-US" smtClean="0"/>
+              <a:rPr lang="en-US"/>
               <a:t>Third level</a:t>
             </a:r>
           </a:p>
           <a:p>
             <a:pPr lvl="3"/>
             <a:r>
-              <a:rPr lang="en-US" smtClean="0"/>
+              <a:rPr lang="en-US"/>
               <a:t>Fourth level</a:t>
             </a:r>
           </a:p>
           <a:p>
             <a:pPr lvl="4"/>
             <a:r>
-              <a:rPr lang="en-US" smtClean="0"/>
+              <a:rPr lang="en-US"/>
               <a:t>Fifth level</a:t>
             </a:r>
-            <a:endParaRPr lang="en-US"/>
           </a:p>
         </p:txBody>
       </p:sp>
@@ -813,7 +824,7 @@
           <a:p>
             <a:fld id="{5BCAD085-E8A6-8845-BD4E-CB4CCA059FC4}" type="datetimeFigureOut">
               <a:rPr lang="en-US" smtClean="0"/>
-              <a:t>1/27/13</a:t>
+              <a:t>7/11/2026</a:t>
             </a:fld>
             <a:endParaRPr lang="en-US"/>
           </a:p>
@@ -916,10 +927,9 @@
           </a:lstStyle>
           <a:p>
             <a:r>
-              <a:rPr lang="en-US" smtClean="0"/>
+              <a:rPr lang="en-US"/>
               <a:t>Click to edit Master title style</a:t>
             </a:r>
-            <a:endParaRPr lang="en-US"/>
           </a:p>
         </p:txBody>
       </p:sp>
@@ -1036,7 +1046,7 @@
           <a:p>
             <a:pPr lvl="0"/>
             <a:r>
-              <a:rPr lang="en-US" smtClean="0"/>
+              <a:rPr lang="en-US"/>
               <a:t>Click to edit Master text styles</a:t>
             </a:r>
           </a:p>
@@ -1059,7 +1069,7 @@
           <a:p>
             <a:fld id="{5BCAD085-E8A6-8845-BD4E-CB4CCA059FC4}" type="datetimeFigureOut">
               <a:rPr lang="en-US" smtClean="0"/>
-              <a:t>1/27/13</a:t>
+              <a:t>7/11/2026</a:t>
             </a:fld>
             <a:endParaRPr lang="en-US"/>
           </a:p>
@@ -1153,10 +1163,9 @@
           <a:lstStyle/>
           <a:p>
             <a:r>
-              <a:rPr lang="en-US" smtClean="0"/>
+              <a:rPr lang="en-US"/>
               <a:t>Click to edit Master title style</a:t>
             </a:r>
-            <a:endParaRPr lang="en-US"/>
           </a:p>
         </p:txBody>
       </p:sp>
@@ -1210,38 +1219,37 @@
           <a:p>
             <a:pPr lvl="0"/>
             <a:r>
-              <a:rPr lang="en-US" smtClean="0"/>
+              <a:rPr lang="en-US"/>
               <a:t>Click to edit Master text styles</a:t>
             </a:r>
           </a:p>
           <a:p>
             <a:pPr lvl="1"/>
             <a:r>
-              <a:rPr lang="en-US" smtClean="0"/>
+              <a:rPr lang="en-US"/>
               <a:t>Second level</a:t>
             </a:r>
           </a:p>
           <a:p>
             <a:pPr lvl="2"/>
             <a:r>
-              <a:rPr lang="en-US" smtClean="0"/>
+              <a:rPr lang="en-US"/>
               <a:t>Third level</a:t>
             </a:r>
           </a:p>
           <a:p>
             <a:pPr lvl="3"/>
             <a:r>
-              <a:rPr lang="en-US" smtClean="0"/>
+              <a:rPr lang="en-US"/>
               <a:t>Fourth level</a:t>
             </a:r>
           </a:p>
           <a:p>
             <a:pPr lvl="4"/>
             <a:r>
-              <a:rPr lang="en-US" smtClean="0"/>
+              <a:rPr lang="en-US"/>
               <a:t>Fifth level</a:t>
             </a:r>
-            <a:endParaRPr lang="en-US"/>
           </a:p>
         </p:txBody>
       </p:sp>
@@ -1295,38 +1303,37 @@
           <a:p>
             <a:pPr lvl="0"/>
             <a:r>
-              <a:rPr lang="en-US" smtClean="0"/>
+              <a:rPr lang="en-US"/>
               <a:t>Click to edit Master text styles</a:t>
             </a:r>
           </a:p>
           <a:p>
             <a:pPr lvl="1"/>
             <a:r>
-              <a:rPr lang="en-US" smtClean="0"/>
+              <a:rPr lang="en-US"/>
               <a:t>Second level</a:t>
             </a:r>
           </a:p>
           <a:p>
             <a:pPr lvl="2"/>
             <a:r>
-              <a:rPr lang="en-US" smtClean="0"/>
+              <a:rPr lang="en-US"/>
               <a:t>Third level</a:t>
             </a:r>
           </a:p>
           <a:p>
             <a:pPr lvl="3"/>
             <a:r>
-              <a:rPr lang="en-US" smtClean="0"/>
+              <a:rPr lang="en-US"/>
               <a:t>Fourth level</a:t>
             </a:r>
           </a:p>
           <a:p>
             <a:pPr lvl="4"/>
             <a:r>
-              <a:rPr lang="en-US" smtClean="0"/>
+              <a:rPr lang="en-US"/>
               <a:t>Fifth level</a:t>
             </a:r>
-            <a:endParaRPr lang="en-US"/>
           </a:p>
         </p:txBody>
       </p:sp>
@@ -1347,7 +1354,7 @@
           <a:p>
             <a:fld id="{5BCAD085-E8A6-8845-BD4E-CB4CCA059FC4}" type="datetimeFigureOut">
               <a:rPr lang="en-US" smtClean="0"/>
-              <a:t>1/27/13</a:t>
+              <a:t>7/11/2026</a:t>
             </a:fld>
             <a:endParaRPr lang="en-US"/>
           </a:p>
@@ -1445,10 +1452,9 @@
           </a:lstStyle>
           <a:p>
             <a:r>
-              <a:rPr lang="en-US" smtClean="0"/>
+              <a:rPr lang="en-US"/>
               <a:t>Click to edit Master title style</a:t>
             </a:r>
-            <a:endParaRPr lang="en-US"/>
           </a:p>
         </p:txBody>
       </p:sp>
@@ -1511,7 +1517,7 @@
           <a:p>
             <a:pPr lvl="0"/>
             <a:r>
-              <a:rPr lang="en-US" smtClean="0"/>
+              <a:rPr lang="en-US"/>
               <a:t>Click to edit Master text styles</a:t>
             </a:r>
           </a:p>
@@ -1567,38 +1573,37 @@
           <a:p>
             <a:pPr lvl="0"/>
             <a:r>
-              <a:rPr lang="en-US" smtClean="0"/>
+              <a:rPr lang="en-US"/>
               <a:t>Click to edit Master text styles</a:t>
             </a:r>
           </a:p>
           <a:p>
             <a:pPr lvl="1"/>
             <a:r>
-              <a:rPr lang="en-US" smtClean="0"/>
+              <a:rPr lang="en-US"/>
               <a:t>Second level</a:t>
             </a:r>
           </a:p>
           <a:p>
             <a:pPr lvl="2"/>
             <a:r>
-              <a:rPr lang="en-US" smtClean="0"/>
+              <a:rPr lang="en-US"/>
               <a:t>Third level</a:t>
             </a:r>
           </a:p>
           <a:p>
             <a:pPr lvl="3"/>
             <a:r>
-              <a:rPr lang="en-US" smtClean="0"/>
+              <a:rPr lang="en-US"/>
               <a:t>Fourth level</a:t>
             </a:r>
           </a:p>
           <a:p>
             <a:pPr lvl="4"/>
             <a:r>
-              <a:rPr lang="en-US" smtClean="0"/>
+              <a:rPr lang="en-US"/>
               <a:t>Fifth level</a:t>
             </a:r>
-            <a:endParaRPr lang="en-US"/>
           </a:p>
         </p:txBody>
       </p:sp>
@@ -1661,7 +1666,7 @@
           <a:p>
             <a:pPr lvl="0"/>
             <a:r>
-              <a:rPr lang="en-US" smtClean="0"/>
+              <a:rPr lang="en-US"/>
               <a:t>Click to edit Master text styles</a:t>
             </a:r>
           </a:p>
@@ -1717,38 +1722,37 @@
           <a:p>
             <a:pPr lvl="0"/>
             <a:r>
-              <a:rPr lang="en-US" smtClean="0"/>
+              <a:rPr lang="en-US"/>
               <a:t>Click to edit Master text styles</a:t>
             </a:r>
           </a:p>
           <a:p>
             <a:pPr lvl="1"/>
             <a:r>
-              <a:rPr lang="en-US" smtClean="0"/>
+              <a:rPr lang="en-US"/>
               <a:t>Second level</a:t>
             </a:r>
           </a:p>
           <a:p>
             <a:pPr lvl="2"/>
             <a:r>
-              <a:rPr lang="en-US" smtClean="0"/>
+              <a:rPr lang="en-US"/>
               <a:t>Third level</a:t>
             </a:r>
           </a:p>
           <a:p>
             <a:pPr lvl="3"/>
             <a:r>
-              <a:rPr lang="en-US" smtClean="0"/>
+              <a:rPr lang="en-US"/>
               <a:t>Fourth level</a:t>
             </a:r>
           </a:p>
           <a:p>
             <a:pPr lvl="4"/>
             <a:r>
-              <a:rPr lang="en-US" smtClean="0"/>
+              <a:rPr lang="en-US"/>
               <a:t>Fifth level</a:t>
             </a:r>
-            <a:endParaRPr lang="en-US"/>
           </a:p>
         </p:txBody>
       </p:sp>
@@ -1769,7 +1773,7 @@
           <a:p>
             <a:fld id="{5BCAD085-E8A6-8845-BD4E-CB4CCA059FC4}" type="datetimeFigureOut">
               <a:rPr lang="en-US" smtClean="0"/>
-              <a:t>1/27/13</a:t>
+              <a:t>7/11/2026</a:t>
             </a:fld>
             <a:endParaRPr lang="en-US"/>
           </a:p>
@@ -1863,10 +1867,9 @@
           <a:lstStyle/>
           <a:p>
             <a:r>
-              <a:rPr lang="en-US" smtClean="0"/>
+              <a:rPr lang="en-US"/>
               <a:t>Click to edit Master title style</a:t>
             </a:r>
-            <a:endParaRPr lang="en-US"/>
           </a:p>
         </p:txBody>
       </p:sp>
@@ -1887,7 +1890,7 @@
           <a:p>
             <a:fld id="{5BCAD085-E8A6-8845-BD4E-CB4CCA059FC4}" type="datetimeFigureOut">
               <a:rPr lang="en-US" smtClean="0"/>
-              <a:t>1/27/13</a:t>
+              <a:t>7/11/2026</a:t>
             </a:fld>
             <a:endParaRPr lang="en-US"/>
           </a:p>
@@ -1982,7 +1985,7 @@
           <a:p>
             <a:fld id="{5BCAD085-E8A6-8845-BD4E-CB4CCA059FC4}" type="datetimeFigureOut">
               <a:rPr lang="en-US" smtClean="0"/>
-              <a:t>1/27/13</a:t>
+              <a:t>7/11/2026</a:t>
             </a:fld>
             <a:endParaRPr lang="en-US"/>
           </a:p>
@@ -2085,10 +2088,9 @@
           </a:lstStyle>
           <a:p>
             <a:r>
-              <a:rPr lang="en-US" smtClean="0"/>
+              <a:rPr lang="en-US"/>
               <a:t>Click to edit Master title style</a:t>
             </a:r>
-            <a:endParaRPr lang="en-US"/>
           </a:p>
         </p:txBody>
       </p:sp>
@@ -2142,38 +2144,37 @@
           <a:p>
             <a:pPr lvl="0"/>
             <a:r>
-              <a:rPr lang="en-US" smtClean="0"/>
+              <a:rPr lang="en-US"/>
               <a:t>Click to edit Master text styles</a:t>
             </a:r>
           </a:p>
           <a:p>
             <a:pPr lvl="1"/>
             <a:r>
-              <a:rPr lang="en-US" smtClean="0"/>
+              <a:rPr lang="en-US"/>
               <a:t>Second level</a:t>
             </a:r>
           </a:p>
           <a:p>
             <a:pPr lvl="2"/>
             <a:r>
-              <a:rPr lang="en-US" smtClean="0"/>
+              <a:rPr lang="en-US"/>
               <a:t>Third level</a:t>
             </a:r>
           </a:p>
           <a:p>
             <a:pPr lvl="3"/>
             <a:r>
-              <a:rPr lang="en-US" smtClean="0"/>
+              <a:rPr lang="en-US"/>
               <a:t>Fourth level</a:t>
             </a:r>
           </a:p>
           <a:p>
             <a:pPr lvl="4"/>
             <a:r>
-              <a:rPr lang="en-US" smtClean="0"/>
+              <a:rPr lang="en-US"/>
               <a:t>Fifth level</a:t>
             </a:r>
-            <a:endParaRPr lang="en-US"/>
           </a:p>
         </p:txBody>
       </p:sp>
@@ -2236,7 +2237,7 @@
           <a:p>
             <a:pPr lvl="0"/>
             <a:r>
-              <a:rPr lang="en-US" smtClean="0"/>
+              <a:rPr lang="en-US"/>
               <a:t>Click to edit Master text styles</a:t>
             </a:r>
           </a:p>
@@ -2259,7 +2260,7 @@
           <a:p>
             <a:fld id="{5BCAD085-E8A6-8845-BD4E-CB4CCA059FC4}" type="datetimeFigureOut">
               <a:rPr lang="en-US" smtClean="0"/>
-              <a:t>1/27/13</a:t>
+              <a:t>7/11/2026</a:t>
             </a:fld>
             <a:endParaRPr lang="en-US"/>
           </a:p>
@@ -2362,10 +2363,9 @@
           </a:lstStyle>
           <a:p>
             <a:r>
-              <a:rPr lang="en-US" smtClean="0"/>
+              <a:rPr lang="en-US"/>
               <a:t>Click to edit Master title style</a:t>
             </a:r>
-            <a:endParaRPr lang="en-US"/>
           </a:p>
         </p:txBody>
       </p:sp>
@@ -2489,7 +2489,7 @@
           <a:p>
             <a:pPr lvl="0"/>
             <a:r>
-              <a:rPr lang="en-US" smtClean="0"/>
+              <a:rPr lang="en-US"/>
               <a:t>Click to edit Master text styles</a:t>
             </a:r>
           </a:p>
@@ -2512,7 +2512,7 @@
           <a:p>
             <a:fld id="{5BCAD085-E8A6-8845-BD4E-CB4CCA059FC4}" type="datetimeFigureOut">
               <a:rPr lang="en-US" smtClean="0"/>
-              <a:t>1/27/13</a:t>
+              <a:t>7/11/2026</a:t>
             </a:fld>
             <a:endParaRPr lang="en-US"/>
           </a:p>
@@ -2621,10 +2621,9 @@
           <a:lstStyle/>
           <a:p>
             <a:r>
-              <a:rPr lang="en-US" smtClean="0"/>
+              <a:rPr lang="en-US"/>
               <a:t>Click to edit Master title style</a:t>
             </a:r>
-            <a:endParaRPr lang="en-US"/>
           </a:p>
         </p:txBody>
       </p:sp>
@@ -2655,38 +2654,37 @@
           <a:p>
             <a:pPr lvl="0"/>
             <a:r>
-              <a:rPr lang="en-US" smtClean="0"/>
+              <a:rPr lang="en-US"/>
               <a:t>Click to edit Master text styles</a:t>
             </a:r>
           </a:p>
           <a:p>
             <a:pPr lvl="1"/>
             <a:r>
-              <a:rPr lang="en-US" smtClean="0"/>
+              <a:rPr lang="en-US"/>
               <a:t>Second level</a:t>
             </a:r>
           </a:p>
           <a:p>
             <a:pPr lvl="2"/>
             <a:r>
-              <a:rPr lang="en-US" smtClean="0"/>
+              <a:rPr lang="en-US"/>
               <a:t>Third level</a:t>
             </a:r>
           </a:p>
           <a:p>
             <a:pPr lvl="3"/>
             <a:r>
-              <a:rPr lang="en-US" smtClean="0"/>
+              <a:rPr lang="en-US"/>
               <a:t>Fourth level</a:t>
             </a:r>
           </a:p>
           <a:p>
             <a:pPr lvl="4"/>
             <a:r>
-              <a:rPr lang="en-US" smtClean="0"/>
+              <a:rPr lang="en-US"/>
               <a:t>Fifth level</a:t>
             </a:r>
-            <a:endParaRPr lang="en-US"/>
           </a:p>
         </p:txBody>
       </p:sp>
@@ -2725,7 +2723,7 @@
           <a:p>
             <a:fld id="{5BCAD085-E8A6-8845-BD4E-CB4CCA059FC4}" type="datetimeFigureOut">
               <a:rPr lang="en-US" smtClean="0"/>
-              <a:t>1/27/13</a:t>
+              <a:t>7/11/2026</a:t>
             </a:fld>
             <a:endParaRPr lang="en-US"/>
           </a:p>
@@ -3084,7 +3082,7 @@
 </file>
 
 <file path=ppt/slides/slide1.xml><?xml version="1.0" encoding="utf-8"?>
-<p:sld xmlns:a="http://schemas.openxmlformats.org/drawingml/2006/main" xmlns:p="http://schemas.openxmlformats.org/presentationml/2006/main" xmlns:r="http://schemas.openxmlformats.org/officeDocument/2006/relationships">
+<p:sld xmlns:a="http://schemas.openxmlformats.org/drawingml/2006/main" xmlns:r="http://schemas.openxmlformats.org/officeDocument/2006/relationships" xmlns:p="http://schemas.openxmlformats.org/presentationml/2006/main">
   <p:cSld>
     <p:spTree>
       <p:nvGrpSpPr>
@@ -3092,7 +3090,14 @@
         <p:cNvGrpSpPr/>
         <p:nvPr/>
       </p:nvGrpSpPr>
-      <p:grpSpPr/>
+      <p:grpSpPr>
+        <a:xfrm>
+          <a:off x="0" y="0"/>
+          <a:ext cx="0" cy="0"/>
+          <a:chOff x="0" y="0"/>
+          <a:chExt cx="0" cy="0"/>
+        </a:xfrm>
+      </p:grpSpPr>
       <p:sp>
         <p:nvSpPr>
           <p:cNvPr id="2" name="Title 1"/>
@@ -3144,7 +3149,7 @@
 </file>
 
 <file path=ppt/slides/slide2.xml><?xml version="1.0" encoding="utf-8"?>
-<p:sld xmlns:a="http://schemas.openxmlformats.org/drawingml/2006/main" xmlns:p="http://schemas.openxmlformats.org/presentationml/2006/main" xmlns:r="http://schemas.openxmlformats.org/officeDocument/2006/relationships">
+<p:sld xmlns:a="http://schemas.openxmlformats.org/drawingml/2006/main" xmlns:r="http://schemas.openxmlformats.org/officeDocument/2006/relationships" xmlns:p="http://schemas.openxmlformats.org/presentationml/2006/main">
   <p:cSld>
     <p:spTree>
       <p:nvGrpSpPr>
@@ -3152,7 +3157,14 @@
         <p:cNvGrpSpPr/>
         <p:nvPr/>
       </p:nvGrpSpPr>
-      <p:grpSpPr/>
+      <p:grpSpPr>
+        <a:xfrm>
+          <a:off x="0" y="0"/>
+          <a:ext cx="0" cy="0"/>
+          <a:chOff x="0" y="0"/>
+          <a:chExt cx="0" cy="0"/>
+        </a:xfrm>
+      </p:grpSpPr>
       <p:sp>
         <p:nvSpPr>
           <p:cNvPr id="2" name="Title 1"/>
@@ -3190,7 +3202,40 @@
           <a:lstStyle/>
           <a:p>
             <a:r>
-              <a:t>Add your demonstration notes here.</a:t>
+              <a:rPr lang="en-US" dirty="0"/>
+              <a:t>Detect LPG gas leakage.</a:t>
+            </a:r>
+          </a:p>
+          <a:p>
+            <a:r>
+              <a:rPr lang="en-US" dirty="0"/>
+              <a:t>Display system status on an LCD.</a:t>
+            </a:r>
+          </a:p>
+          <a:p>
+            <a:r>
+              <a:rPr lang="en-US" dirty="0"/>
+              <a:t>Alert users using a buzzer.</a:t>
+            </a:r>
+          </a:p>
+          <a:p>
+            <a:r>
+              <a:rPr lang="en-US" dirty="0"/>
+              <a:t>Automatically close the gas valve using a servo motor.</a:t>
+            </a:r>
+          </a:p>
+          <a:p>
+            <a:r>
+              <a:rPr lang="en-US" dirty="0"/>
+              <a:t>Turn ON an exhaust fan using a </a:t>
+            </a:r>
+            <a:r>
+              <a:rPr lang="en-US" dirty="0" err="1"/>
+              <a:t>relay.Improve</a:t>
+            </a:r>
+            <a:r>
+              <a:rPr lang="en-US" dirty="0"/>
+              <a:t> household and industrial safest</a:t>
             </a:r>
           </a:p>
         </p:txBody>
@@ -3204,7 +3249,7 @@
 </file>
 
 <file path=ppt/slides/slide3.xml><?xml version="1.0" encoding="utf-8"?>
-<p:sld xmlns:a="http://schemas.openxmlformats.org/drawingml/2006/main" xmlns:p="http://schemas.openxmlformats.org/presentationml/2006/main" xmlns:r="http://schemas.openxmlformats.org/officeDocument/2006/relationships">
+<p:sld xmlns:a="http://schemas.openxmlformats.org/drawingml/2006/main" xmlns:r="http://schemas.openxmlformats.org/officeDocument/2006/relationships" xmlns:p="http://schemas.openxmlformats.org/presentationml/2006/main">
   <p:cSld>
     <p:spTree>
       <p:nvGrpSpPr>
@@ -3212,7 +3257,14 @@
         <p:cNvGrpSpPr/>
         <p:nvPr/>
       </p:nvGrpSpPr>
-      <p:grpSpPr/>
+      <p:grpSpPr>
+        <a:xfrm>
+          <a:off x="0" y="0"/>
+          <a:ext cx="0" cy="0"/>
+          <a:chOff x="0" y="0"/>
+          <a:chExt cx="0" cy="0"/>
+        </a:xfrm>
+      </p:grpSpPr>
       <p:sp>
         <p:nvSpPr>
           <p:cNvPr id="2" name="Title 1"/>
@@ -3246,12 +3298,70 @@
         </p:nvSpPr>
         <p:spPr/>
         <p:txBody>
-          <a:bodyPr/>
-          <a:lstStyle/>
-          <a:p>
-            <a:r>
-              <a:t>Add your demonstration notes here.</a:t>
-            </a:r>
+          <a:bodyPr>
+            <a:normAutofit fontScale="85000" lnSpcReduction="20000"/>
+          </a:bodyPr>
+          <a:lstStyle/>
+          <a:p>
+            <a:r>
+              <a:rPr lang="en-IN" dirty="0"/>
+              <a:t>ESP32 Development Board</a:t>
+            </a:r>
+          </a:p>
+          <a:p>
+            <a:r>
+              <a:rPr lang="en-IN" dirty="0"/>
+              <a:t>MQ-2 Gas Sensor</a:t>
+            </a:r>
+          </a:p>
+          <a:p>
+            <a:r>
+              <a:rPr lang="en-IN" dirty="0"/>
+              <a:t>SG90 Servo Motor</a:t>
+            </a:r>
+          </a:p>
+          <a:p>
+            <a:r>
+              <a:rPr lang="en-IN" dirty="0"/>
+              <a:t>16×2 I2C LCD</a:t>
+            </a:r>
+          </a:p>
+          <a:p>
+            <a:r>
+              <a:rPr lang="en-IN" dirty="0"/>
+              <a:t>Relay Module</a:t>
+            </a:r>
+          </a:p>
+          <a:p>
+            <a:r>
+              <a:rPr lang="en-IN" dirty="0"/>
+              <a:t>Active Buzzer</a:t>
+            </a:r>
+          </a:p>
+          <a:p>
+            <a:r>
+              <a:rPr lang="en-IN" dirty="0"/>
+              <a:t>Buck Converter</a:t>
+            </a:r>
+          </a:p>
+          <a:p>
+            <a:r>
+              <a:rPr lang="en-IN" dirty="0"/>
+              <a:t>Breadboard</a:t>
+            </a:r>
+          </a:p>
+          <a:p>
+            <a:r>
+              <a:rPr lang="en-IN" dirty="0"/>
+              <a:t>Jumper Wires</a:t>
+            </a:r>
+          </a:p>
+          <a:p>
+            <a:r>
+              <a:rPr lang="en-IN" dirty="0"/>
+              <a:t>Power Supply.</a:t>
+            </a:r>
+            <a:endParaRPr dirty="0"/>
           </a:p>
         </p:txBody>
       </p:sp>
@@ -3264,7 +3374,7 @@
 </file>
 
 <file path=ppt/slides/slide4.xml><?xml version="1.0" encoding="utf-8"?>
-<p:sld xmlns:a="http://schemas.openxmlformats.org/drawingml/2006/main" xmlns:p="http://schemas.openxmlformats.org/presentationml/2006/main" xmlns:r="http://schemas.openxmlformats.org/officeDocument/2006/relationships">
+<p:sld xmlns:a="http://schemas.openxmlformats.org/drawingml/2006/main" xmlns:r="http://schemas.openxmlformats.org/officeDocument/2006/relationships" xmlns:p="http://schemas.openxmlformats.org/presentationml/2006/main">
   <p:cSld>
     <p:spTree>
       <p:nvGrpSpPr>
@@ -3272,10 +3382,23 @@
         <p:cNvGrpSpPr/>
         <p:nvPr/>
       </p:nvGrpSpPr>
-      <p:grpSpPr/>
-      <p:sp>
-        <p:nvSpPr>
-          <p:cNvPr id="2" name="Title 1"/>
+      <p:grpSpPr>
+        <a:xfrm>
+          <a:off x="0" y="0"/>
+          <a:ext cx="0" cy="0"/>
+          <a:chOff x="0" y="0"/>
+          <a:chExt cx="0" cy="0"/>
+        </a:xfrm>
+      </p:grpSpPr>
+      <p:sp>
+        <p:nvSpPr>
+          <p:cNvPr id="2" name="Title 1">
+            <a:extLst>
+              <a:ext uri="{FF2B5EF4-FFF2-40B4-BE49-F238E27FC236}">
+                <a16:creationId xmlns:a16="http://schemas.microsoft.com/office/drawing/2014/main" id="{9D4563DB-5735-DA23-04A8-0DE390BEAEDD}"/>
+              </a:ext>
+            </a:extLst>
+          </p:cNvPr>
           <p:cNvSpPr>
             <a:spLocks noGrp="1"/>
           </p:cNvSpPr>
@@ -3289,33 +3412,413 @@
           <a:lstStyle/>
           <a:p>
             <a:r>
-              <a:t>Working</a:t>
-            </a:r>
-          </a:p>
-        </p:txBody>
-      </p:sp>
-      <p:sp>
-        <p:nvSpPr>
-          <p:cNvPr id="3" name="Content Placeholder 2"/>
-          <p:cNvSpPr>
-            <a:spLocks noGrp="1"/>
-          </p:cNvSpPr>
+              <a:rPr lang="en-IN" dirty="0"/>
+              <a:t>CIRCUIT CONNECTION</a:t>
+            </a:r>
+          </a:p>
+        </p:txBody>
+      </p:sp>
+      <p:graphicFrame>
+        <p:nvGraphicFramePr>
+          <p:cNvPr id="4" name="Content Placeholder 3">
+            <a:extLst>
+              <a:ext uri="{FF2B5EF4-FFF2-40B4-BE49-F238E27FC236}">
+                <a16:creationId xmlns:a16="http://schemas.microsoft.com/office/drawing/2014/main" id="{51B40A5C-161A-5845-ED97-C00CAE81E5C7}"/>
+              </a:ext>
+            </a:extLst>
+          </p:cNvPr>
+          <p:cNvGraphicFramePr>
+            <a:graphicFrameLocks noGrp="1"/>
+          </p:cNvGraphicFramePr>
           <p:nvPr>
             <p:ph idx="1"/>
-          </p:nvPr>
-        </p:nvSpPr>
-        <p:spPr/>
-        <p:txBody>
-          <a:bodyPr/>
-          <a:lstStyle/>
-          <a:p>
-            <a:r>
-              <a:t>Add your demonstration notes here.</a:t>
-            </a:r>
-          </a:p>
-        </p:txBody>
-      </p:sp>
+            <p:extLst>
+              <p:ext uri="{D42A27DB-BD31-4B8C-83A1-F6EECF244321}">
+                <p14:modId xmlns:p14="http://schemas.microsoft.com/office/powerpoint/2010/main" val="4013419570"/>
+              </p:ext>
+            </p:extLst>
+          </p:nvPr>
+        </p:nvGraphicFramePr>
+        <p:xfrm>
+          <a:off x="457200" y="1600199"/>
+          <a:ext cx="8229600" cy="4661476"/>
+        </p:xfrm>
+        <a:graphic>
+          <a:graphicData uri="http://schemas.openxmlformats.org/drawingml/2006/table">
+            <a:tbl>
+              <a:tblPr firstRow="1" bandRow="1">
+                <a:tableStyleId>{5C22544A-7EE6-4342-B048-85BDC9FD1C3A}</a:tableStyleId>
+              </a:tblPr>
+              <a:tblGrid>
+                <a:gridCol w="4114800">
+                  <a:extLst>
+                    <a:ext uri="{9D8B030D-6E8A-4147-A177-3AD203B41FA5}">
+                      <a16:colId xmlns:a16="http://schemas.microsoft.com/office/drawing/2014/main" val="1814939812"/>
+                    </a:ext>
+                  </a:extLst>
+                </a:gridCol>
+                <a:gridCol w="4114800">
+                  <a:extLst>
+                    <a:ext uri="{9D8B030D-6E8A-4147-A177-3AD203B41FA5}">
+                      <a16:colId xmlns:a16="http://schemas.microsoft.com/office/drawing/2014/main" val="2285835481"/>
+                    </a:ext>
+                  </a:extLst>
+                </a:gridCol>
+              </a:tblGrid>
+              <a:tr h="665726">
+                <a:tc>
+                  <a:txBody>
+                    <a:bodyPr/>
+                    <a:lstStyle/>
+                    <a:p>
+                      <a:pPr algn="ctr"/>
+                      <a:r>
+                        <a:rPr lang="en-IN" dirty="0"/>
+                        <a:t>COMPONENTS</a:t>
+                      </a:r>
+                    </a:p>
+                  </a:txBody>
+                  <a:tcPr/>
+                </a:tc>
+                <a:tc>
+                  <a:txBody>
+                    <a:bodyPr/>
+                    <a:lstStyle/>
+                    <a:p>
+                      <a:pPr algn="ctr"/>
+                      <a:r>
+                        <a:rPr lang="en-IN" dirty="0"/>
+                        <a:t>GPIO</a:t>
+                      </a:r>
+                    </a:p>
+                  </a:txBody>
+                  <a:tcPr/>
+                </a:tc>
+                <a:extLst>
+                  <a:ext uri="{0D108BD9-81ED-4DB2-BD59-A6C34878D82A}">
+                    <a16:rowId xmlns:a16="http://schemas.microsoft.com/office/drawing/2014/main" val="869801343"/>
+                  </a:ext>
+                </a:extLst>
+              </a:tr>
+              <a:tr h="665726">
+                <a:tc>
+                  <a:txBody>
+                    <a:bodyPr/>
+                    <a:lstStyle/>
+                    <a:p>
+                      <a:pPr algn="ctr"/>
+                      <a:r>
+                        <a:rPr lang="en-IN" dirty="0"/>
+                        <a:t>MQ-2</a:t>
+                      </a:r>
+                    </a:p>
+                  </a:txBody>
+                  <a:tcPr>
+                    <a:lnB w="12700" cmpd="sng">
+                      <a:noFill/>
+                    </a:lnB>
+                  </a:tcPr>
+                </a:tc>
+                <a:tc>
+                  <a:txBody>
+                    <a:bodyPr/>
+                    <a:lstStyle/>
+                    <a:p>
+                      <a:pPr algn="ctr"/>
+                      <a:r>
+                        <a:rPr lang="en-IN" dirty="0"/>
+                        <a:t>GPIO-34</a:t>
+                      </a:r>
+                    </a:p>
+                  </a:txBody>
+                  <a:tcPr/>
+                </a:tc>
+                <a:extLst>
+                  <a:ext uri="{0D108BD9-81ED-4DB2-BD59-A6C34878D82A}">
+                    <a16:rowId xmlns:a16="http://schemas.microsoft.com/office/drawing/2014/main" val="3666887838"/>
+                  </a:ext>
+                </a:extLst>
+              </a:tr>
+              <a:tr h="665726">
+                <a:tc>
+                  <a:txBody>
+                    <a:bodyPr/>
+                    <a:lstStyle/>
+                    <a:p>
+                      <a:pPr algn="ctr"/>
+                      <a:r>
+                        <a:rPr lang="en-IN" dirty="0"/>
+                        <a:t>SERVO</a:t>
+                      </a:r>
+                    </a:p>
+                  </a:txBody>
+                  <a:tcPr>
+                    <a:lnL w="12700" cmpd="sng">
+                      <a:noFill/>
+                    </a:lnL>
+                    <a:lnR w="12700" cmpd="sng">
+                      <a:noFill/>
+                    </a:lnR>
+                    <a:lnT w="12700" cmpd="sng">
+                      <a:noFill/>
+                    </a:lnT>
+                    <a:lnB w="12700" cmpd="sng">
+                      <a:noFill/>
+                    </a:lnB>
+                    <a:lnTlToBr w="12700" cmpd="sng">
+                      <a:noFill/>
+                      <a:prstDash val="solid"/>
+                    </a:lnTlToBr>
+                    <a:lnBlToTr w="12700" cmpd="sng">
+                      <a:noFill/>
+                      <a:prstDash val="solid"/>
+                    </a:lnBlToTr>
+                  </a:tcPr>
+                </a:tc>
+                <a:tc>
+                  <a:txBody>
+                    <a:bodyPr/>
+                    <a:lstStyle/>
+                    <a:p>
+                      <a:pPr algn="ctr"/>
+                      <a:r>
+                        <a:rPr lang="en-IN" dirty="0"/>
+                        <a:t>GPIO-13</a:t>
+                      </a:r>
+                    </a:p>
+                  </a:txBody>
+                  <a:tcPr>
+                    <a:lnL w="12700" cmpd="sng">
+                      <a:noFill/>
+                    </a:lnL>
+                  </a:tcPr>
+                </a:tc>
+                <a:extLst>
+                  <a:ext uri="{0D108BD9-81ED-4DB2-BD59-A6C34878D82A}">
+                    <a16:rowId xmlns:a16="http://schemas.microsoft.com/office/drawing/2014/main" val="3212884209"/>
+                  </a:ext>
+                </a:extLst>
+              </a:tr>
+              <a:tr h="667120">
+                <a:tc>
+                  <a:txBody>
+                    <a:bodyPr/>
+                    <a:lstStyle/>
+                    <a:p>
+                      <a:pPr algn="ctr"/>
+                      <a:r>
+                        <a:rPr lang="en-IN" dirty="0"/>
+                        <a:t>BUZZER</a:t>
+                      </a:r>
+                    </a:p>
+                  </a:txBody>
+                  <a:tcPr>
+                    <a:lnL w="12700" cmpd="sng">
+                      <a:noFill/>
+                    </a:lnL>
+                    <a:lnR w="12700" cmpd="sng">
+                      <a:noFill/>
+                    </a:lnR>
+                    <a:lnT w="12700" cmpd="sng">
+                      <a:noFill/>
+                    </a:lnT>
+                    <a:lnB w="12700" cmpd="sng">
+                      <a:noFill/>
+                    </a:lnB>
+                    <a:lnTlToBr w="12700" cmpd="sng">
+                      <a:noFill/>
+                      <a:prstDash val="solid"/>
+                    </a:lnTlToBr>
+                    <a:lnBlToTr w="12700" cmpd="sng">
+                      <a:noFill/>
+                      <a:prstDash val="solid"/>
+                    </a:lnBlToTr>
+                  </a:tcPr>
+                </a:tc>
+                <a:tc>
+                  <a:txBody>
+                    <a:bodyPr/>
+                    <a:lstStyle/>
+                    <a:p>
+                      <a:pPr algn="ctr"/>
+                      <a:r>
+                        <a:rPr lang="en-IN" dirty="0"/>
+                        <a:t>GPIO-26</a:t>
+                      </a:r>
+                    </a:p>
+                  </a:txBody>
+                  <a:tcPr>
+                    <a:lnL w="12700" cmpd="sng">
+                      <a:noFill/>
+                    </a:lnL>
+                  </a:tcPr>
+                </a:tc>
+                <a:extLst>
+                  <a:ext uri="{0D108BD9-81ED-4DB2-BD59-A6C34878D82A}">
+                    <a16:rowId xmlns:a16="http://schemas.microsoft.com/office/drawing/2014/main" val="3273279313"/>
+                  </a:ext>
+                </a:extLst>
+              </a:tr>
+              <a:tr h="665726">
+                <a:tc>
+                  <a:txBody>
+                    <a:bodyPr/>
+                    <a:lstStyle/>
+                    <a:p>
+                      <a:pPr algn="ctr"/>
+                      <a:r>
+                        <a:rPr lang="en-IN" dirty="0"/>
+                        <a:t>RELAY</a:t>
+                      </a:r>
+                    </a:p>
+                  </a:txBody>
+                  <a:tcPr>
+                    <a:lnT w="12700" cmpd="sng">
+                      <a:noFill/>
+                    </a:lnT>
+                  </a:tcPr>
+                </a:tc>
+                <a:tc>
+                  <a:txBody>
+                    <a:bodyPr/>
+                    <a:lstStyle/>
+                    <a:p>
+                      <a:pPr algn="ctr"/>
+                      <a:r>
+                        <a:rPr lang="en-IN" dirty="0"/>
+                        <a:t>GPIO-27</a:t>
+                      </a:r>
+                    </a:p>
+                  </a:txBody>
+                  <a:tcPr/>
+                </a:tc>
+                <a:extLst>
+                  <a:ext uri="{0D108BD9-81ED-4DB2-BD59-A6C34878D82A}">
+                    <a16:rowId xmlns:a16="http://schemas.microsoft.com/office/drawing/2014/main" val="765918619"/>
+                  </a:ext>
+                </a:extLst>
+              </a:tr>
+              <a:tr h="665726">
+                <a:tc>
+                  <a:txBody>
+                    <a:bodyPr/>
+                    <a:lstStyle/>
+                    <a:p>
+                      <a:pPr algn="ctr"/>
+                      <a:r>
+                        <a:rPr lang="en-IN" dirty="0"/>
+                        <a:t>LCD SCL</a:t>
+                      </a:r>
+                    </a:p>
+                  </a:txBody>
+                  <a:tcPr>
+                    <a:lnB w="12700" cmpd="sng">
+                      <a:noFill/>
+                    </a:lnB>
+                  </a:tcPr>
+                </a:tc>
+                <a:tc>
+                  <a:txBody>
+                    <a:bodyPr/>
+                    <a:lstStyle/>
+                    <a:p>
+                      <a:pPr algn="ctr"/>
+                      <a:r>
+                        <a:rPr lang="en-IN" dirty="0"/>
+                        <a:t>GPIO-22</a:t>
+                      </a:r>
+                    </a:p>
+                  </a:txBody>
+                  <a:tcPr/>
+                </a:tc>
+                <a:extLst>
+                  <a:ext uri="{0D108BD9-81ED-4DB2-BD59-A6C34878D82A}">
+                    <a16:rowId xmlns:a16="http://schemas.microsoft.com/office/drawing/2014/main" val="2016936550"/>
+                  </a:ext>
+                </a:extLst>
+              </a:tr>
+              <a:tr h="665726">
+                <a:tc>
+                  <a:txBody>
+                    <a:bodyPr/>
+                    <a:lstStyle/>
+                    <a:p>
+                      <a:pPr algn="ctr"/>
+                      <a:r>
+                        <a:rPr lang="en-IN" dirty="0"/>
+                        <a:t>LCD SDA</a:t>
+                      </a:r>
+                    </a:p>
+                  </a:txBody>
+                  <a:tcPr>
+                    <a:lnL w="12700" cmpd="sng">
+                      <a:noFill/>
+                    </a:lnL>
+                    <a:lnR w="12700" cap="flat" cmpd="sng" algn="ctr">
+                      <a:solidFill>
+                        <a:schemeClr val="tx1"/>
+                      </a:solidFill>
+                      <a:prstDash val="solid"/>
+                      <a:round/>
+                      <a:headEnd type="none" w="med" len="med"/>
+                      <a:tailEnd type="none" w="med" len="med"/>
+                    </a:lnR>
+                    <a:lnT w="12700" cmpd="sng">
+                      <a:noFill/>
+                    </a:lnT>
+                    <a:lnB w="12700" cmpd="sng">
+                      <a:noFill/>
+                    </a:lnB>
+                    <a:lnTlToBr w="12700" cmpd="sng">
+                      <a:noFill/>
+                      <a:prstDash val="solid"/>
+                    </a:lnTlToBr>
+                    <a:lnBlToTr w="12700" cmpd="sng">
+                      <a:noFill/>
+                      <a:prstDash val="solid"/>
+                    </a:lnBlToTr>
+                  </a:tcPr>
+                </a:tc>
+                <a:tc>
+                  <a:txBody>
+                    <a:bodyPr/>
+                    <a:lstStyle/>
+                    <a:p>
+                      <a:pPr algn="ctr"/>
+                      <a:r>
+                        <a:rPr lang="en-IN" dirty="0"/>
+                        <a:t>GPIO-21</a:t>
+                      </a:r>
+                    </a:p>
+                  </a:txBody>
+                  <a:tcPr>
+                    <a:lnL w="12700" cap="flat" cmpd="sng" algn="ctr">
+                      <a:solidFill>
+                        <a:schemeClr val="tx1"/>
+                      </a:solidFill>
+                      <a:prstDash val="solid"/>
+                      <a:round/>
+                      <a:headEnd type="none" w="med" len="med"/>
+                      <a:tailEnd type="none" w="med" len="med"/>
+                    </a:lnL>
+                  </a:tcPr>
+                </a:tc>
+                <a:extLst>
+                  <a:ext uri="{0D108BD9-81ED-4DB2-BD59-A6C34878D82A}">
+                    <a16:rowId xmlns:a16="http://schemas.microsoft.com/office/drawing/2014/main" val="1340570495"/>
+                  </a:ext>
+                </a:extLst>
+              </a:tr>
+            </a:tbl>
+          </a:graphicData>
+        </a:graphic>
+      </p:graphicFrame>
     </p:spTree>
+    <p:extLst>
+      <p:ext uri="{BB962C8B-B14F-4D97-AF65-F5344CB8AC3E}">
+        <p14:creationId xmlns:p14="http://schemas.microsoft.com/office/powerpoint/2010/main" val="1358197715"/>
+      </p:ext>
+    </p:extLst>
   </p:cSld>
   <p:clrMapOvr>
     <a:masterClrMapping/>
@@ -3324,7 +3827,7 @@
 </file>
 
 <file path=ppt/slides/slide5.xml><?xml version="1.0" encoding="utf-8"?>
-<p:sld xmlns:a="http://schemas.openxmlformats.org/drawingml/2006/main" xmlns:p="http://schemas.openxmlformats.org/presentationml/2006/main" xmlns:r="http://schemas.openxmlformats.org/officeDocument/2006/relationships">
+<p:sld xmlns:a="http://schemas.openxmlformats.org/drawingml/2006/main" xmlns:r="http://schemas.openxmlformats.org/officeDocument/2006/relationships" xmlns:p="http://schemas.openxmlformats.org/presentationml/2006/main">
   <p:cSld>
     <p:spTree>
       <p:nvGrpSpPr>
@@ -3332,7 +3835,14 @@
         <p:cNvGrpSpPr/>
         <p:nvPr/>
       </p:nvGrpSpPr>
-      <p:grpSpPr/>
+      <p:grpSpPr>
+        <a:xfrm>
+          <a:off x="0" y="0"/>
+          <a:ext cx="0" cy="0"/>
+          <a:chOff x="0" y="0"/>
+          <a:chExt cx="0" cy="0"/>
+        </a:xfrm>
+      </p:grpSpPr>
       <p:sp>
         <p:nvSpPr>
           <p:cNvPr id="2" name="Title 1"/>
@@ -3349,7 +3859,7 @@
           <a:lstStyle/>
           <a:p>
             <a:r>
-              <a:t>Results</a:t>
+              <a:t>Working</a:t>
             </a:r>
           </a:p>
         </p:txBody>
@@ -3366,12 +3876,90 @@
         </p:nvSpPr>
         <p:spPr/>
         <p:txBody>
-          <a:bodyPr/>
-          <a:lstStyle/>
-          <a:p>
-            <a:r>
-              <a:t>Add your demonstration notes here.</a:t>
-            </a:r>
+          <a:bodyPr>
+            <a:normAutofit fontScale="77500" lnSpcReduction="20000"/>
+          </a:bodyPr>
+          <a:lstStyle/>
+          <a:p>
+            <a:pPr marL="0" indent="0">
+              <a:buNone/>
+            </a:pPr>
+            <a:r>
+              <a:rPr lang="en-IN" b="1" dirty="0"/>
+              <a:t>Normal Condition  </a:t>
+            </a:r>
+          </a:p>
+          <a:p>
+            <a:r>
+              <a:rPr lang="en-IN" dirty="0"/>
+              <a:t>MQ-2 continuously monitors gas.</a:t>
+            </a:r>
+          </a:p>
+          <a:p>
+            <a:r>
+              <a:rPr lang="en-IN" dirty="0"/>
+              <a:t>LCD displays LPG SAFE.</a:t>
+            </a:r>
+          </a:p>
+          <a:p>
+            <a:r>
+              <a:rPr lang="en-IN" dirty="0"/>
+              <a:t>Servo remains at 0°.</a:t>
+            </a:r>
+          </a:p>
+          <a:p>
+            <a:r>
+              <a:rPr lang="en-IN" dirty="0"/>
+              <a:t>Relay </a:t>
+            </a:r>
+            <a:r>
+              <a:rPr lang="en-IN" dirty="0" err="1"/>
+              <a:t>OFF.Buzzer</a:t>
+            </a:r>
+            <a:r>
+              <a:rPr lang="en-IN" dirty="0"/>
+              <a:t> OFF.</a:t>
+            </a:r>
+          </a:p>
+          <a:p>
+            <a:pPr marL="0" indent="0">
+              <a:buNone/>
+            </a:pPr>
+            <a:r>
+              <a:rPr lang="en-IN" b="1" dirty="0"/>
+              <a:t>Gas Leakage</a:t>
+            </a:r>
+          </a:p>
+          <a:p>
+            <a:r>
+              <a:rPr lang="en-IN" dirty="0"/>
+              <a:t>MQ-2 detects LPG.</a:t>
+            </a:r>
+          </a:p>
+          <a:p>
+            <a:r>
+              <a:rPr lang="en-IN" dirty="0"/>
+              <a:t>ESP32 activates the buzzer.</a:t>
+            </a:r>
+          </a:p>
+          <a:p>
+            <a:r>
+              <a:rPr lang="en-IN" dirty="0"/>
+              <a:t>Relay turns ON.</a:t>
+            </a:r>
+          </a:p>
+          <a:p>
+            <a:r>
+              <a:rPr lang="en-IN" dirty="0"/>
+              <a:t>Servo rotates to close the gas valve.</a:t>
+            </a:r>
+          </a:p>
+          <a:p>
+            <a:r>
+              <a:rPr lang="en-IN" dirty="0"/>
+              <a:t>LCD displays WARNING! GAS LEAK.</a:t>
+            </a:r>
+            <a:endParaRPr dirty="0"/>
           </a:p>
         </p:txBody>
       </p:sp>
@@ -3384,7 +3972,7 @@
 </file>
 
 <file path=ppt/slides/slide6.xml><?xml version="1.0" encoding="utf-8"?>
-<p:sld xmlns:a="http://schemas.openxmlformats.org/drawingml/2006/main" xmlns:p="http://schemas.openxmlformats.org/presentationml/2006/main" xmlns:r="http://schemas.openxmlformats.org/officeDocument/2006/relationships">
+<p:sld xmlns:a="http://schemas.openxmlformats.org/drawingml/2006/main" xmlns:r="http://schemas.openxmlformats.org/officeDocument/2006/relationships" xmlns:p="http://schemas.openxmlformats.org/presentationml/2006/main">
   <p:cSld>
     <p:spTree>
       <p:nvGrpSpPr>
@@ -3392,7 +3980,353 @@
         <p:cNvGrpSpPr/>
         <p:nvPr/>
       </p:nvGrpSpPr>
-      <p:grpSpPr/>
+      <p:grpSpPr>
+        <a:xfrm>
+          <a:off x="0" y="0"/>
+          <a:ext cx="0" cy="0"/>
+          <a:chOff x="0" y="0"/>
+          <a:chExt cx="0" cy="0"/>
+        </a:xfrm>
+      </p:grpSpPr>
+      <p:sp>
+        <p:nvSpPr>
+          <p:cNvPr id="2" name="Title 1">
+            <a:extLst>
+              <a:ext uri="{FF2B5EF4-FFF2-40B4-BE49-F238E27FC236}">
+                <a16:creationId xmlns:a16="http://schemas.microsoft.com/office/drawing/2014/main" id="{10767672-04B1-9D73-A476-AB91D4A62FD0}"/>
+              </a:ext>
+            </a:extLst>
+          </p:cNvPr>
+          <p:cNvSpPr>
+            <a:spLocks noGrp="1"/>
+          </p:cNvSpPr>
+          <p:nvPr>
+            <p:ph type="title"/>
+          </p:nvPr>
+        </p:nvSpPr>
+        <p:spPr/>
+        <p:txBody>
+          <a:bodyPr/>
+          <a:lstStyle/>
+          <a:p>
+            <a:r>
+              <a:rPr lang="en-IN" dirty="0"/>
+              <a:t>BLOCK DIAGRAM</a:t>
+            </a:r>
+          </a:p>
+        </p:txBody>
+      </p:sp>
+      <p:sp>
+        <p:nvSpPr>
+          <p:cNvPr id="3" name="Content Placeholder 2">
+            <a:extLst>
+              <a:ext uri="{FF2B5EF4-FFF2-40B4-BE49-F238E27FC236}">
+                <a16:creationId xmlns:a16="http://schemas.microsoft.com/office/drawing/2014/main" id="{E1B17A84-6805-8FF9-CB34-A60C5ECE63E1}"/>
+              </a:ext>
+            </a:extLst>
+          </p:cNvPr>
+          <p:cNvSpPr>
+            <a:spLocks noGrp="1"/>
+          </p:cNvSpPr>
+          <p:nvPr>
+            <p:ph idx="1"/>
+          </p:nvPr>
+        </p:nvSpPr>
+        <p:spPr/>
+        <p:txBody>
+          <a:bodyPr/>
+          <a:lstStyle/>
+          <a:p>
+            <a:r>
+              <a:rPr lang="en-IN" dirty="0"/>
+              <a:t>LPG Gas    │MQ-2 Sensor    │ESP32 Controller ├─────────────┬──────────────┬─────────────┐ │             │              │             │LCD        Buzzer        Relay         Servo                             │                        Exhaust Fan</a:t>
+            </a:r>
+          </a:p>
+        </p:txBody>
+      </p:sp>
+    </p:spTree>
+    <p:extLst>
+      <p:ext uri="{BB962C8B-B14F-4D97-AF65-F5344CB8AC3E}">
+        <p14:creationId xmlns:p14="http://schemas.microsoft.com/office/powerpoint/2010/main" val="3854477597"/>
+      </p:ext>
+    </p:extLst>
+  </p:cSld>
+  <p:clrMapOvr>
+    <a:masterClrMapping/>
+  </p:clrMapOvr>
+</p:sld>
+</file>
+
+<file path=ppt/slides/slide7.xml><?xml version="1.0" encoding="utf-8"?>
+<p:sld xmlns:a="http://schemas.openxmlformats.org/drawingml/2006/main" xmlns:r="http://schemas.openxmlformats.org/officeDocument/2006/relationships" xmlns:p="http://schemas.openxmlformats.org/presentationml/2006/main">
+  <p:cSld>
+    <p:spTree>
+      <p:nvGrpSpPr>
+        <p:cNvPr id="1" name=""/>
+        <p:cNvGrpSpPr/>
+        <p:nvPr/>
+      </p:nvGrpSpPr>
+      <p:grpSpPr>
+        <a:xfrm>
+          <a:off x="0" y="0"/>
+          <a:ext cx="0" cy="0"/>
+          <a:chOff x="0" y="0"/>
+          <a:chExt cx="0" cy="0"/>
+        </a:xfrm>
+      </p:grpSpPr>
+      <p:sp>
+        <p:nvSpPr>
+          <p:cNvPr id="2" name="Title 1">
+            <a:extLst>
+              <a:ext uri="{FF2B5EF4-FFF2-40B4-BE49-F238E27FC236}">
+                <a16:creationId xmlns:a16="http://schemas.microsoft.com/office/drawing/2014/main" id="{D05FB8C6-903E-46DA-EFAA-CDD4E6B23942}"/>
+              </a:ext>
+            </a:extLst>
+          </p:cNvPr>
+          <p:cNvSpPr>
+            <a:spLocks noGrp="1"/>
+          </p:cNvSpPr>
+          <p:nvPr>
+            <p:ph type="title"/>
+          </p:nvPr>
+        </p:nvSpPr>
+        <p:spPr/>
+        <p:txBody>
+          <a:bodyPr/>
+          <a:lstStyle/>
+          <a:p>
+            <a:r>
+              <a:rPr lang="en-IN" dirty="0"/>
+              <a:t>FLOWCHART</a:t>
+            </a:r>
+          </a:p>
+        </p:txBody>
+      </p:sp>
+      <p:sp>
+        <p:nvSpPr>
+          <p:cNvPr id="3" name="Content Placeholder 2">
+            <a:extLst>
+              <a:ext uri="{FF2B5EF4-FFF2-40B4-BE49-F238E27FC236}">
+                <a16:creationId xmlns:a16="http://schemas.microsoft.com/office/drawing/2014/main" id="{A6887350-0B57-6AE3-7940-0F80C385E694}"/>
+              </a:ext>
+            </a:extLst>
+          </p:cNvPr>
+          <p:cNvSpPr>
+            <a:spLocks noGrp="1"/>
+          </p:cNvSpPr>
+          <p:nvPr>
+            <p:ph idx="1"/>
+          </p:nvPr>
+        </p:nvSpPr>
+        <p:spPr>
+          <a:xfrm>
+            <a:off x="457200" y="1600200"/>
+            <a:ext cx="7742903" cy="4446639"/>
+          </a:xfrm>
+        </p:spPr>
+        <p:txBody>
+          <a:bodyPr>
+            <a:normAutofit fontScale="32500" lnSpcReduction="20000"/>
+          </a:bodyPr>
+          <a:lstStyle/>
+          <a:p>
+            <a:r>
+              <a:rPr lang="en-IN" dirty="0"/>
+              <a:t>Start</a:t>
+            </a:r>
+          </a:p>
+          <a:p>
+            <a:r>
+              <a:rPr lang="en-IN" dirty="0"/>
+              <a:t>↓</a:t>
+            </a:r>
+          </a:p>
+          <a:p>
+            <a:r>
+              <a:rPr lang="en-IN" dirty="0"/>
+              <a:t>Initialize ESP32</a:t>
+            </a:r>
+          </a:p>
+          <a:p>
+            <a:r>
+              <a:rPr lang="en-IN" dirty="0"/>
+              <a:t>↓</a:t>
+            </a:r>
+          </a:p>
+          <a:p>
+            <a:r>
+              <a:rPr lang="en-IN" dirty="0"/>
+              <a:t>Read MQ2 Sensor</a:t>
+            </a:r>
+          </a:p>
+          <a:p>
+            <a:r>
+              <a:rPr lang="en-IN" dirty="0"/>
+              <a:t>↓</a:t>
+            </a:r>
+          </a:p>
+          <a:p>
+            <a:r>
+              <a:rPr lang="en-IN" dirty="0"/>
+              <a:t>Gas &gt; Threshold ?   </a:t>
+            </a:r>
+          </a:p>
+          <a:p>
+            <a:r>
+              <a:rPr lang="en-IN" dirty="0"/>
+              <a:t>↓</a:t>
+            </a:r>
+          </a:p>
+          <a:p>
+            <a:r>
+              <a:rPr lang="en-IN" dirty="0" err="1"/>
+              <a:t>YesLCD</a:t>
+            </a:r>
+            <a:r>
+              <a:rPr lang="en-IN" dirty="0"/>
+              <a:t> Warning</a:t>
+            </a:r>
+          </a:p>
+          <a:p>
+            <a:r>
+              <a:rPr lang="en-IN" dirty="0"/>
+              <a:t>↓</a:t>
+            </a:r>
+          </a:p>
+          <a:p>
+            <a:r>
+              <a:rPr lang="en-IN" dirty="0"/>
+              <a:t>Buzzer ON</a:t>
+            </a:r>
+          </a:p>
+          <a:p>
+            <a:r>
+              <a:rPr lang="en-IN" dirty="0"/>
+              <a:t>↓</a:t>
+            </a:r>
+          </a:p>
+          <a:p>
+            <a:r>
+              <a:rPr lang="en-IN" dirty="0"/>
+              <a:t>Relay ON</a:t>
+            </a:r>
+          </a:p>
+          <a:p>
+            <a:r>
+              <a:rPr lang="en-IN" dirty="0"/>
+              <a:t>↓</a:t>
+            </a:r>
+          </a:p>
+          <a:p>
+            <a:r>
+              <a:rPr lang="en-IN" dirty="0"/>
+              <a:t>Servo 90°</a:t>
+            </a:r>
+          </a:p>
+          <a:p>
+            <a:r>
+              <a:rPr lang="en-IN" dirty="0"/>
+              <a:t>↓</a:t>
+            </a:r>
+          </a:p>
+          <a:p>
+            <a:r>
+              <a:rPr lang="en-IN" dirty="0"/>
+              <a:t>Continue Monitoring</a:t>
+            </a:r>
+          </a:p>
+          <a:p>
+            <a:r>
+              <a:rPr lang="en-IN" dirty="0"/>
+              <a:t>↓</a:t>
+            </a:r>
+          </a:p>
+          <a:p>
+            <a:r>
+              <a:rPr lang="en-IN" dirty="0"/>
+              <a:t>No</a:t>
+            </a:r>
+          </a:p>
+          <a:p>
+            <a:r>
+              <a:rPr lang="en-IN" dirty="0"/>
+              <a:t>↓</a:t>
+            </a:r>
+          </a:p>
+          <a:p>
+            <a:r>
+              <a:rPr lang="en-IN" dirty="0"/>
+              <a:t>LCD Safe</a:t>
+            </a:r>
+          </a:p>
+          <a:p>
+            <a:r>
+              <a:rPr lang="en-IN" dirty="0"/>
+              <a:t>↓</a:t>
+            </a:r>
+          </a:p>
+          <a:p>
+            <a:r>
+              <a:rPr lang="en-IN" dirty="0"/>
+              <a:t>Relay OFF</a:t>
+            </a:r>
+          </a:p>
+          <a:p>
+            <a:r>
+              <a:rPr lang="en-IN" dirty="0"/>
+              <a:t>↓</a:t>
+            </a:r>
+          </a:p>
+          <a:p>
+            <a:r>
+              <a:rPr lang="en-IN" dirty="0"/>
+              <a:t>Servo 0°</a:t>
+            </a:r>
+          </a:p>
+          <a:p>
+            <a:r>
+              <a:rPr lang="en-IN" dirty="0"/>
+              <a:t>↓</a:t>
+            </a:r>
+          </a:p>
+          <a:p>
+            <a:r>
+              <a:rPr lang="en-IN" dirty="0"/>
+              <a:t>Repeat</a:t>
+            </a:r>
+          </a:p>
+        </p:txBody>
+      </p:sp>
+    </p:spTree>
+    <p:extLst>
+      <p:ext uri="{BB962C8B-B14F-4D97-AF65-F5344CB8AC3E}">
+        <p14:creationId xmlns:p14="http://schemas.microsoft.com/office/powerpoint/2010/main" val="3978296737"/>
+      </p:ext>
+    </p:extLst>
+  </p:cSld>
+  <p:clrMapOvr>
+    <a:masterClrMapping/>
+  </p:clrMapOvr>
+</p:sld>
+</file>
+
+<file path=ppt/slides/slide8.xml><?xml version="1.0" encoding="utf-8"?>
+<p:sld xmlns:a="http://schemas.openxmlformats.org/drawingml/2006/main" xmlns:r="http://schemas.openxmlformats.org/officeDocument/2006/relationships" xmlns:p="http://schemas.openxmlformats.org/presentationml/2006/main">
+  <p:cSld>
+    <p:spTree>
+      <p:nvGrpSpPr>
+        <p:cNvPr id="1" name=""/>
+        <p:cNvGrpSpPr/>
+        <p:nvPr/>
+      </p:nvGrpSpPr>
+      <p:grpSpPr>
+        <a:xfrm>
+          <a:off x="0" y="0"/>
+          <a:ext cx="0" cy="0"/>
+          <a:chOff x="0" y="0"/>
+          <a:chExt cx="0" cy="0"/>
+        </a:xfrm>
+      </p:grpSpPr>
       <p:sp>
         <p:nvSpPr>
           <p:cNvPr id="2" name="Title 1"/>
@@ -3409,6 +4343,121 @@
           <a:lstStyle/>
           <a:p>
             <a:r>
+              <a:rPr lang="en-IN" dirty="0"/>
+              <a:t>Advantages</a:t>
+            </a:r>
+            <a:endParaRPr dirty="0"/>
+          </a:p>
+        </p:txBody>
+      </p:sp>
+      <p:sp>
+        <p:nvSpPr>
+          <p:cNvPr id="3" name="Content Placeholder 2"/>
+          <p:cNvSpPr>
+            <a:spLocks noGrp="1"/>
+          </p:cNvSpPr>
+          <p:nvPr>
+            <p:ph idx="1"/>
+          </p:nvPr>
+        </p:nvSpPr>
+        <p:spPr/>
+        <p:txBody>
+          <a:bodyPr>
+            <a:normAutofit lnSpcReduction="10000"/>
+          </a:bodyPr>
+          <a:lstStyle/>
+          <a:p>
+            <a:r>
+              <a:rPr lang="en-US" dirty="0"/>
+              <a:t>Low-cost system</a:t>
+            </a:r>
+          </a:p>
+          <a:p>
+            <a:r>
+              <a:rPr lang="en-US" dirty="0"/>
+              <a:t>Easy to build</a:t>
+            </a:r>
+          </a:p>
+          <a:p>
+            <a:r>
+              <a:rPr lang="en-US" dirty="0"/>
+              <a:t>Automatic safety response</a:t>
+            </a:r>
+          </a:p>
+          <a:p>
+            <a:r>
+              <a:rPr lang="en-US" dirty="0"/>
+              <a:t>Reduces fire hazards</a:t>
+            </a:r>
+          </a:p>
+          <a:p>
+            <a:r>
+              <a:rPr lang="en-US" dirty="0"/>
+              <a:t>Easy to upgrade with IoT</a:t>
+            </a:r>
+          </a:p>
+          <a:p>
+            <a:r>
+              <a:rPr lang="en-US" dirty="0"/>
+              <a:t>User-friendly </a:t>
+            </a:r>
+          </a:p>
+          <a:p>
+            <a:r>
+              <a:rPr lang="en-US" dirty="0"/>
+              <a:t>LCD interface</a:t>
+            </a:r>
+          </a:p>
+          <a:p>
+            <a:r>
+              <a:rPr lang="en-US" dirty="0"/>
+              <a:t>Suitable for homes and industries</a:t>
+            </a:r>
+            <a:endParaRPr dirty="0"/>
+          </a:p>
+        </p:txBody>
+      </p:sp>
+    </p:spTree>
+  </p:cSld>
+  <p:clrMapOvr>
+    <a:masterClrMapping/>
+  </p:clrMapOvr>
+</p:sld>
+</file>
+
+<file path=ppt/slides/slide9.xml><?xml version="1.0" encoding="utf-8"?>
+<p:sld xmlns:a="http://schemas.openxmlformats.org/drawingml/2006/main" xmlns:r="http://schemas.openxmlformats.org/officeDocument/2006/relationships" xmlns:p="http://schemas.openxmlformats.org/presentationml/2006/main">
+  <p:cSld>
+    <p:spTree>
+      <p:nvGrpSpPr>
+        <p:cNvPr id="1" name=""/>
+        <p:cNvGrpSpPr/>
+        <p:nvPr/>
+      </p:nvGrpSpPr>
+      <p:grpSpPr>
+        <a:xfrm>
+          <a:off x="0" y="0"/>
+          <a:ext cx="0" cy="0"/>
+          <a:chOff x="0" y="0"/>
+          <a:chExt cx="0" cy="0"/>
+        </a:xfrm>
+      </p:grpSpPr>
+      <p:sp>
+        <p:nvSpPr>
+          <p:cNvPr id="2" name="Title 1"/>
+          <p:cNvSpPr>
+            <a:spLocks noGrp="1"/>
+          </p:cNvSpPr>
+          <p:nvPr>
+            <p:ph type="title"/>
+          </p:nvPr>
+        </p:nvSpPr>
+        <p:spPr/>
+        <p:txBody>
+          <a:bodyPr/>
+          <a:lstStyle/>
+          <a:p>
+            <a:r>
               <a:t>Future Scope</a:t>
             </a:r>
           </a:p>
@@ -3426,12 +4475,67 @@
         </p:nvSpPr>
         <p:spPr/>
         <p:txBody>
-          <a:bodyPr/>
-          <a:lstStyle/>
-          <a:p>
-            <a:r>
-              <a:t>Add your demonstration notes here.</a:t>
-            </a:r>
+          <a:bodyPr>
+            <a:normAutofit fontScale="92500" lnSpcReduction="20000"/>
+          </a:bodyPr>
+          <a:lstStyle/>
+          <a:p>
+            <a:pPr marL="0" indent="0">
+              <a:buNone/>
+            </a:pPr>
+            <a:r>
+              <a:rPr lang="en-IN" dirty="0"/>
+              <a:t>Future Enhancements</a:t>
+            </a:r>
+          </a:p>
+          <a:p>
+            <a:r>
+              <a:rPr lang="en-IN" dirty="0"/>
+              <a:t>Blynk IoT mobile notifications</a:t>
+            </a:r>
+          </a:p>
+          <a:p>
+            <a:r>
+              <a:rPr lang="en-IN" dirty="0"/>
+              <a:t>GSM SMS alerts</a:t>
+            </a:r>
+          </a:p>
+          <a:p>
+            <a:r>
+              <a:rPr lang="en-IN" dirty="0"/>
+              <a:t>Flame sensor integration</a:t>
+            </a:r>
+          </a:p>
+          <a:p>
+            <a:r>
+              <a:rPr lang="en-IN" dirty="0"/>
+              <a:t>Temperature monitoring</a:t>
+            </a:r>
+          </a:p>
+          <a:p>
+            <a:r>
+              <a:rPr lang="en-IN" dirty="0"/>
+              <a:t>Cloud data logging</a:t>
+            </a:r>
+          </a:p>
+          <a:p>
+            <a:r>
+              <a:rPr lang="en-IN" dirty="0"/>
+              <a:t>AI-based gas level prediction</a:t>
+            </a:r>
+          </a:p>
+          <a:p>
+            <a:r>
+              <a:rPr lang="en-IN" dirty="0"/>
+              <a:t>Battery backup</a:t>
+            </a:r>
+          </a:p>
+          <a:p>
+            <a:r>
+              <a:rPr lang="en-IN" dirty="0"/>
+              <a:t>Mobile application</a:t>
+            </a:r>
+            <a:endParaRPr dirty="0"/>
           </a:p>
         </p:txBody>
       </p:sp>
